--- a/attachment/Certificate.pptx
+++ b/attachment/Certificate.pptx
@@ -15,7 +15,7 @@
       <p:regular r:id="rId3"/>
     </p:embeddedFont>
     <p:embeddedFont>
-      <p:font typeface="DM Serif Display" panose="020F0502020204030204" pitchFamily="2" charset="0"/>
+      <p:font typeface="DM Serif Display" pitchFamily="2" charset="0"/>
       <p:regular r:id="rId4"/>
     </p:embeddedFont>
     <p:embeddedFont>
@@ -4749,7 +4749,7 @@
               </a:lnSpc>
             </a:pPr>
             <a:r>
-              <a:rPr lang="en-US" sz="2036" b="1" i="1" spc="437">
+              <a:rPr lang="en-US" sz="2036" b="1" i="1" spc="437" dirty="0">
                 <a:solidFill>
                   <a:srgbClr val="000000"/>
                 </a:solidFill>
@@ -4790,7 +4790,7 @@
               </a:lnSpc>
             </a:pPr>
             <a:r>
-              <a:rPr lang="en-US" sz="4998" spc="499">
+              <a:rPr lang="en-US" sz="4998" spc="499" dirty="0">
                 <a:solidFill>
                   <a:srgbClr val="0025CC"/>
                 </a:solidFill>
@@ -4883,15 +4883,15 @@
         </p:nvSpPr>
         <p:spPr>
           <a:xfrm>
-            <a:off x="6685292" y="3928125"/>
-            <a:ext cx="4917416" cy="397281"/>
+            <a:off x="6591300" y="3927976"/>
+            <a:ext cx="5105400" cy="402354"/>
           </a:xfrm>
           <a:prstGeom prst="rect">
             <a:avLst/>
           </a:prstGeom>
         </p:spPr>
         <p:txBody>
-          <a:bodyPr lIns="0" tIns="0" rIns="0" bIns="0" rtlCol="0" anchor="t">
+          <a:bodyPr wrap="square" lIns="0" tIns="0" rIns="0" bIns="0" rtlCol="0" anchor="t">
             <a:spAutoFit/>
           </a:bodyPr>
           <a:lstStyle/>
@@ -4905,7 +4905,7 @@
               </a:spcBef>
             </a:pPr>
             <a:r>
-              <a:rPr lang="en-US" sz="2959" b="1" spc="-88">
+              <a:rPr lang="en-US" sz="2959" b="1" spc="-88" dirty="0">
                 <a:solidFill>
                   <a:srgbClr val="000000"/>
                 </a:solidFill>
@@ -4927,7 +4927,7 @@
         </p:nvSpPr>
         <p:spPr>
           <a:xfrm>
-            <a:off x="4572740" y="3146339"/>
+            <a:off x="4646475" y="3146339"/>
             <a:ext cx="8995047" cy="1254959"/>
           </a:xfrm>
           <a:prstGeom prst="rect">

--- a/attachment/Certificate.pptx
+++ b/attachment/Certificate.pptx
@@ -3216,8 +3216,8 @@
         </p:nvGrpSpPr>
         <p:grpSpPr>
           <a:xfrm>
-            <a:off x="-308371" y="9258300"/>
-            <a:ext cx="18904743" cy="1033139"/>
+            <a:off x="0" y="9258301"/>
+            <a:ext cx="18288000" cy="1028699"/>
             <a:chOff x="0" y="0"/>
             <a:chExt cx="6288514" cy="343666"/>
           </a:xfrm>
@@ -4883,8 +4883,8 @@
         </p:nvSpPr>
         <p:spPr>
           <a:xfrm>
-            <a:off x="6591300" y="3927976"/>
-            <a:ext cx="5105400" cy="402354"/>
+            <a:off x="6193714" y="3960316"/>
+            <a:ext cx="5753100" cy="402354"/>
           </a:xfrm>
           <a:prstGeom prst="rect">
             <a:avLst/>
@@ -4928,7 +4928,7 @@
         <p:spPr>
           <a:xfrm>
             <a:off x="4646475" y="3146339"/>
-            <a:ext cx="8995047" cy="1254959"/>
+            <a:ext cx="8995047" cy="639406"/>
           </a:xfrm>
           <a:prstGeom prst="rect">
             <a:avLst/>
@@ -4960,25 +4960,6 @@
               </a:rPr>
               <a:t>CERTIFICATE OF PARTICIPATION</a:t>
             </a:r>
-          </a:p>
-          <a:p>
-            <a:pPr algn="ctr">
-              <a:lnSpc>
-                <a:spcPts val="4760"/>
-              </a:lnSpc>
-              <a:spcBef>
-                <a:spcPct val="0"/>
-              </a:spcBef>
-            </a:pPr>
-            <a:endParaRPr lang="en-US" sz="4621" b="1" spc="-138" dirty="0">
-              <a:solidFill>
-                <a:srgbClr val="CC0000"/>
-              </a:solidFill>
-              <a:latin typeface="Source Serif Pro Bold"/>
-              <a:ea typeface="Source Serif Pro Bold"/>
-              <a:cs typeface="Source Serif Pro Bold"/>
-              <a:sym typeface="Source Serif Pro Bold"/>
-            </a:endParaRPr>
           </a:p>
         </p:txBody>
       </p:sp>

--- a/attachment/Certificate.pptx
+++ b/attachment/Certificate.pptx
@@ -11,40 +11,36 @@
   <p:notesSz cx="6858000" cy="9144000"/>
   <p:embeddedFontLst>
     <p:embeddedFont>
-      <p:font typeface="Aleo Bold Italics" panose="020B0604020202020204" charset="0"/>
+      <p:font typeface="DM Serif Display" pitchFamily="2" charset="0"/>
       <p:regular r:id="rId3"/>
     </p:embeddedFont>
     <p:embeddedFont>
-      <p:font typeface="DM Serif Display" pitchFamily="2" charset="0"/>
+      <p:font typeface="Lato" panose="020F0502020204030203" pitchFamily="34" charset="0"/>
       <p:regular r:id="rId4"/>
     </p:embeddedFont>
     <p:embeddedFont>
-      <p:font typeface="Lato" panose="020F0502020204030203" pitchFamily="34" charset="0"/>
+      <p:font typeface="Lato Bold" panose="020B0604020202020204" charset="0"/>
       <p:regular r:id="rId5"/>
     </p:embeddedFont>
     <p:embeddedFont>
-      <p:font typeface="Lato Bold" panose="020B0604020202020204" charset="0"/>
+      <p:font typeface="League Gothic" panose="020B0604020202020204" charset="0"/>
       <p:regular r:id="rId6"/>
     </p:embeddedFont>
     <p:embeddedFont>
-      <p:font typeface="League Gothic" panose="020B0604020202020204" charset="0"/>
+      <p:font typeface="Libre Baskerville" panose="02000000000000000000" pitchFamily="2" charset="0"/>
       <p:regular r:id="rId7"/>
     </p:embeddedFont>
     <p:embeddedFont>
-      <p:font typeface="Libre Baskerville" panose="02000000000000000000" pitchFamily="2" charset="0"/>
+      <p:font typeface="Libre Baskerville Bold" panose="02000000000000000000" charset="0"/>
       <p:regular r:id="rId8"/>
     </p:embeddedFont>
     <p:embeddedFont>
-      <p:font typeface="Libre Baskerville Bold" panose="02000000000000000000" charset="0"/>
+      <p:font typeface="Source Serif Pro Bold" panose="020B0604020202020204" charset="0"/>
       <p:regular r:id="rId9"/>
     </p:embeddedFont>
     <p:embeddedFont>
-      <p:font typeface="Source Serif Pro Bold" panose="020B0604020202020204" charset="0"/>
+      <p:font typeface="TT Hoves" panose="020B0604020202020204" charset="0"/>
       <p:regular r:id="rId10"/>
-    </p:embeddedFont>
-    <p:embeddedFont>
-      <p:font typeface="TT Hoves" panose="020B0604020202020204" charset="0"/>
-      <p:regular r:id="rId11"/>
     </p:embeddedFont>
   </p:embeddedFontLst>
   <p:defaultTextStyle>
@@ -3346,6 +3342,13 @@
             </a:stretch>
           </a:blipFill>
         </p:spPr>
+        <p:txBody>
+          <a:bodyPr/>
+          <a:lstStyle/>
+          <a:p>
+            <a:endParaRPr lang="en-IN" dirty="0"/>
+          </a:p>
+        </p:txBody>
       </p:sp>
       <p:grpSp>
         <p:nvGrpSpPr>
@@ -4724,88 +4727,6 @@
       </p:sp>
       <p:sp>
         <p:nvSpPr>
-          <p:cNvPr id="35" name="TextBox 35"/>
-          <p:cNvSpPr txBox="1"/>
-          <p:nvPr/>
-        </p:nvSpPr>
-        <p:spPr>
-          <a:xfrm>
-            <a:off x="1028700" y="2269206"/>
-            <a:ext cx="15765510" cy="350086"/>
-          </a:xfrm>
-          <a:prstGeom prst="rect">
-            <a:avLst/>
-          </a:prstGeom>
-        </p:spPr>
-        <p:txBody>
-          <a:bodyPr lIns="0" tIns="0" rIns="0" bIns="0" rtlCol="0" anchor="t">
-            <a:spAutoFit/>
-          </a:bodyPr>
-          <a:lstStyle/>
-          <a:p>
-            <a:pPr algn="ctr">
-              <a:lnSpc>
-                <a:spcPts val="2851"/>
-              </a:lnSpc>
-            </a:pPr>
-            <a:r>
-              <a:rPr lang="en-US" sz="2036" b="1" i="1" spc="437" dirty="0">
-                <a:solidFill>
-                  <a:srgbClr val="000000"/>
-                </a:solidFill>
-                <a:latin typeface="Aleo Bold Italics"/>
-                <a:ea typeface="Aleo Bold Italics"/>
-                <a:cs typeface="Aleo Bold Italics"/>
-                <a:sym typeface="Aleo Bold Italics"/>
-              </a:rPr>
-              <a:t>PROUDLY HOSTING FOR THE         TIME AT PVG </a:t>
-            </a:r>
-          </a:p>
-        </p:txBody>
-      </p:sp>
-      <p:sp>
-        <p:nvSpPr>
-          <p:cNvPr id="36" name="TextBox 36"/>
-          <p:cNvSpPr txBox="1"/>
-          <p:nvPr/>
-        </p:nvSpPr>
-        <p:spPr>
-          <a:xfrm>
-            <a:off x="9663322" y="2173385"/>
-            <a:ext cx="1350609" cy="665554"/>
-          </a:xfrm>
-          <a:prstGeom prst="rect">
-            <a:avLst/>
-          </a:prstGeom>
-        </p:spPr>
-        <p:txBody>
-          <a:bodyPr lIns="0" tIns="0" rIns="0" bIns="0" rtlCol="0" anchor="t">
-            <a:spAutoFit/>
-          </a:bodyPr>
-          <a:lstStyle/>
-          <a:p>
-            <a:pPr algn="ctr">
-              <a:lnSpc>
-                <a:spcPts val="5048"/>
-              </a:lnSpc>
-            </a:pPr>
-            <a:r>
-              <a:rPr lang="en-US" sz="4998" spc="499" dirty="0">
-                <a:solidFill>
-                  <a:srgbClr val="0025CC"/>
-                </a:solidFill>
-                <a:latin typeface="League Gothic"/>
-                <a:ea typeface="League Gothic"/>
-                <a:cs typeface="League Gothic"/>
-                <a:sym typeface="League Gothic"/>
-              </a:rPr>
-              <a:t>2ND </a:t>
-            </a:r>
-          </a:p>
-        </p:txBody>
-      </p:sp>
-      <p:sp>
-        <p:nvSpPr>
           <p:cNvPr id="37" name="TextBox 37"/>
           <p:cNvSpPr txBox="1"/>
           <p:nvPr/>

--- a/attachment/Certificate.pptx
+++ b/attachment/Certificate.pptx
@@ -4892,8 +4892,8 @@
         </p:nvSpPr>
         <p:spPr>
           <a:xfrm>
-            <a:off x="1185510" y="8482796"/>
-            <a:ext cx="2130663" cy="616949"/>
+            <a:off x="928001" y="8482796"/>
+            <a:ext cx="2566727" cy="616949"/>
           </a:xfrm>
           <a:prstGeom prst="rect">
             <a:avLst/>
@@ -4982,8 +4982,8 @@
         </p:nvSpPr>
         <p:spPr>
           <a:xfrm>
-            <a:off x="4272418" y="8482796"/>
-            <a:ext cx="2412874" cy="617157"/>
+            <a:off x="3927553" y="8482796"/>
+            <a:ext cx="2820953" cy="617157"/>
           </a:xfrm>
           <a:prstGeom prst="rect">
             <a:avLst/>
@@ -5126,8 +5126,8 @@
         </p:nvSpPr>
         <p:spPr>
           <a:xfrm>
-            <a:off x="11135212" y="8482796"/>
-            <a:ext cx="1971188" cy="616949"/>
+            <a:off x="11039024" y="8482796"/>
+            <a:ext cx="2275627" cy="616949"/>
           </a:xfrm>
           <a:prstGeom prst="rect">
             <a:avLst/>
@@ -5207,8 +5207,8 @@
         </p:nvSpPr>
         <p:spPr>
           <a:xfrm>
-            <a:off x="14174365" y="8482796"/>
-            <a:ext cx="1973059" cy="616949"/>
+            <a:off x="13934001" y="8482796"/>
+            <a:ext cx="2394841" cy="616949"/>
           </a:xfrm>
           <a:prstGeom prst="rect">
             <a:avLst/>

--- a/attachment/Certificate.pptx
+++ b/attachment/Certificate.pptx
@@ -4763,15 +4763,15 @@
         </p:nvSpPr>
         <p:spPr>
           <a:xfrm>
-            <a:off x="16147424" y="1134991"/>
-            <a:ext cx="1312643" cy="174412"/>
+            <a:off x="16029758" y="1135337"/>
+            <a:ext cx="1508068" cy="168701"/>
           </a:xfrm>
           <a:prstGeom prst="rect">
             <a:avLst/>
           </a:prstGeom>
         </p:spPr>
         <p:txBody>
-          <a:bodyPr lIns="0" tIns="0" rIns="0" bIns="0" rtlCol="0" anchor="t">
+          <a:bodyPr wrap="square" lIns="0" tIns="0" rIns="0" bIns="0" rtlCol="0" anchor="t">
             <a:spAutoFit/>
           </a:bodyPr>
           <a:lstStyle/>
@@ -4782,7 +4782,7 @@
               </a:lnSpc>
             </a:pPr>
             <a:r>
-              <a:rPr lang="en-US" sz="1284" spc="128">
+              <a:rPr lang="en-US" sz="1284" spc="128" dirty="0">
                 <a:solidFill>
                   <a:srgbClr val="7A2F00"/>
                 </a:solidFill>

--- a/attachment/Certificate.pptx
+++ b/attachment/Certificate.pptx
@@ -4763,8 +4763,8 @@
         </p:nvSpPr>
         <p:spPr>
           <a:xfrm>
-            <a:off x="16029758" y="1135337"/>
-            <a:ext cx="1508068" cy="168701"/>
+            <a:off x="15674624" y="1166670"/>
+            <a:ext cx="2258242" cy="168701"/>
           </a:xfrm>
           <a:prstGeom prst="rect">
             <a:avLst/>
